--- a/Lez1.pptx
+++ b/Lez1.pptx
@@ -133,7 +133,7 @@
   <pc:docChgLst>
     <pc:chgData name="Alessandro Di Piazza" userId="242384fd-1746-4b70-8d90-c83f4330e5ed" providerId="ADAL" clId="{FFF1DA74-BEAE-470B-8D8A-B7A1F3E1BF85}"/>
     <pc:docChg chg="undo custSel addSld delSld modSld sldOrd">
-      <pc:chgData name="Alessandro Di Piazza" userId="242384fd-1746-4b70-8d90-c83f4330e5ed" providerId="ADAL" clId="{FFF1DA74-BEAE-470B-8D8A-B7A1F3E1BF85}" dt="2026-05-25T08:51:02.642" v="1166" actId="2696"/>
+      <pc:chgData name="Alessandro Di Piazza" userId="242384fd-1746-4b70-8d90-c83f4330e5ed" providerId="ADAL" clId="{FFF1DA74-BEAE-470B-8D8A-B7A1F3E1BF85}" dt="2026-05-27T13:00:02.356" v="1192" actId="20577"/>
       <pc:docMkLst>
         <pc:docMk/>
       </pc:docMkLst>
@@ -169,7 +169,7 @@
         </pc:picChg>
       </pc:sldChg>
       <pc:sldChg chg="addSp modSp new mod">
-        <pc:chgData name="Alessandro Di Piazza" userId="242384fd-1746-4b70-8d90-c83f4330e5ed" providerId="ADAL" clId="{FFF1DA74-BEAE-470B-8D8A-B7A1F3E1BF85}" dt="2026-05-22T11:03:21.992" v="1165" actId="20577"/>
+        <pc:chgData name="Alessandro Di Piazza" userId="242384fd-1746-4b70-8d90-c83f4330e5ed" providerId="ADAL" clId="{FFF1DA74-BEAE-470B-8D8A-B7A1F3E1BF85}" dt="2026-05-27T12:59:39.302" v="1179" actId="403"/>
         <pc:sldMkLst>
           <pc:docMk/>
           <pc:sldMk cId="2312129349" sldId="257"/>
@@ -183,7 +183,7 @@
           </ac:spMkLst>
         </pc:spChg>
         <pc:spChg chg="mod">
-          <ac:chgData name="Alessandro Di Piazza" userId="242384fd-1746-4b70-8d90-c83f4330e5ed" providerId="ADAL" clId="{FFF1DA74-BEAE-470B-8D8A-B7A1F3E1BF85}" dt="2026-05-22T11:03:21.992" v="1165" actId="20577"/>
+          <ac:chgData name="Alessandro Di Piazza" userId="242384fd-1746-4b70-8d90-c83f4330e5ed" providerId="ADAL" clId="{FFF1DA74-BEAE-470B-8D8A-B7A1F3E1BF85}" dt="2026-05-27T12:59:39.302" v="1179" actId="403"/>
           <ac:spMkLst>
             <pc:docMk/>
             <pc:sldMk cId="2312129349" sldId="257"/>
@@ -255,7 +255,7 @@
         </pc:spChg>
       </pc:sldChg>
       <pc:sldChg chg="modSp new mod">
-        <pc:chgData name="Alessandro Di Piazza" userId="242384fd-1746-4b70-8d90-c83f4330e5ed" providerId="ADAL" clId="{FFF1DA74-BEAE-470B-8D8A-B7A1F3E1BF85}" dt="2026-05-22T08:19:09.506" v="788" actId="20577"/>
+        <pc:chgData name="Alessandro Di Piazza" userId="242384fd-1746-4b70-8d90-c83f4330e5ed" providerId="ADAL" clId="{FFF1DA74-BEAE-470B-8D8A-B7A1F3E1BF85}" dt="2026-05-27T13:00:02.356" v="1192" actId="20577"/>
         <pc:sldMkLst>
           <pc:docMk/>
           <pc:sldMk cId="4204095062" sldId="259"/>
@@ -269,7 +269,7 @@
           </ac:spMkLst>
         </pc:spChg>
         <pc:spChg chg="mod">
-          <ac:chgData name="Alessandro Di Piazza" userId="242384fd-1746-4b70-8d90-c83f4330e5ed" providerId="ADAL" clId="{FFF1DA74-BEAE-470B-8D8A-B7A1F3E1BF85}" dt="2026-05-22T08:19:09.506" v="788" actId="20577"/>
+          <ac:chgData name="Alessandro Di Piazza" userId="242384fd-1746-4b70-8d90-c83f4330e5ed" providerId="ADAL" clId="{FFF1DA74-BEAE-470B-8D8A-B7A1F3E1BF85}" dt="2026-05-27T13:00:02.356" v="1192" actId="20577"/>
           <ac:spMkLst>
             <pc:docMk/>
             <pc:sldMk cId="4204095062" sldId="259"/>
@@ -759,7 +759,7 @@
           <a:p>
             <a:fld id="{0365B9A4-39DC-4E39-840A-704E3970A69D}" type="datetimeFigureOut">
               <a:rPr lang="en-US" smtClean="0"/>
-              <a:t>5/25/2026</a:t>
+              <a:t>5/27/2026</a:t>
             </a:fld>
             <a:endParaRPr lang="en-US"/>
           </a:p>
@@ -957,7 +957,7 @@
           <a:p>
             <a:fld id="{0365B9A4-39DC-4E39-840A-704E3970A69D}" type="datetimeFigureOut">
               <a:rPr lang="en-US" smtClean="0"/>
-              <a:t>5/25/2026</a:t>
+              <a:t>5/27/2026</a:t>
             </a:fld>
             <a:endParaRPr lang="en-US"/>
           </a:p>
@@ -1165,7 +1165,7 @@
           <a:p>
             <a:fld id="{0365B9A4-39DC-4E39-840A-704E3970A69D}" type="datetimeFigureOut">
               <a:rPr lang="en-US" smtClean="0"/>
-              <a:t>5/25/2026</a:t>
+              <a:t>5/27/2026</a:t>
             </a:fld>
             <a:endParaRPr lang="en-US"/>
           </a:p>
@@ -1363,7 +1363,7 @@
           <a:p>
             <a:fld id="{0365B9A4-39DC-4E39-840A-704E3970A69D}" type="datetimeFigureOut">
               <a:rPr lang="en-US" smtClean="0"/>
-              <a:t>5/25/2026</a:t>
+              <a:t>5/27/2026</a:t>
             </a:fld>
             <a:endParaRPr lang="en-US"/>
           </a:p>
@@ -1638,7 +1638,7 @@
           <a:p>
             <a:fld id="{0365B9A4-39DC-4E39-840A-704E3970A69D}" type="datetimeFigureOut">
               <a:rPr lang="en-US" smtClean="0"/>
-              <a:t>5/25/2026</a:t>
+              <a:t>5/27/2026</a:t>
             </a:fld>
             <a:endParaRPr lang="en-US"/>
           </a:p>
@@ -1903,7 +1903,7 @@
           <a:p>
             <a:fld id="{0365B9A4-39DC-4E39-840A-704E3970A69D}" type="datetimeFigureOut">
               <a:rPr lang="en-US" smtClean="0"/>
-              <a:t>5/25/2026</a:t>
+              <a:t>5/27/2026</a:t>
             </a:fld>
             <a:endParaRPr lang="en-US"/>
           </a:p>
@@ -2315,7 +2315,7 @@
           <a:p>
             <a:fld id="{0365B9A4-39DC-4E39-840A-704E3970A69D}" type="datetimeFigureOut">
               <a:rPr lang="en-US" smtClean="0"/>
-              <a:t>5/25/2026</a:t>
+              <a:t>5/27/2026</a:t>
             </a:fld>
             <a:endParaRPr lang="en-US"/>
           </a:p>
@@ -2456,7 +2456,7 @@
           <a:p>
             <a:fld id="{0365B9A4-39DC-4E39-840A-704E3970A69D}" type="datetimeFigureOut">
               <a:rPr lang="en-US" smtClean="0"/>
-              <a:t>5/25/2026</a:t>
+              <a:t>5/27/2026</a:t>
             </a:fld>
             <a:endParaRPr lang="en-US"/>
           </a:p>
@@ -2569,7 +2569,7 @@
           <a:p>
             <a:fld id="{0365B9A4-39DC-4E39-840A-704E3970A69D}" type="datetimeFigureOut">
               <a:rPr lang="en-US" smtClean="0"/>
-              <a:t>5/25/2026</a:t>
+              <a:t>5/27/2026</a:t>
             </a:fld>
             <a:endParaRPr lang="en-US"/>
           </a:p>
@@ -2880,7 +2880,7 @@
           <a:p>
             <a:fld id="{0365B9A4-39DC-4E39-840A-704E3970A69D}" type="datetimeFigureOut">
               <a:rPr lang="en-US" smtClean="0"/>
-              <a:t>5/25/2026</a:t>
+              <a:t>5/27/2026</a:t>
             </a:fld>
             <a:endParaRPr lang="en-US"/>
           </a:p>
@@ -3168,7 +3168,7 @@
           <a:p>
             <a:fld id="{0365B9A4-39DC-4E39-840A-704E3970A69D}" type="datetimeFigureOut">
               <a:rPr lang="en-US" smtClean="0"/>
-              <a:t>5/25/2026</a:t>
+              <a:t>5/27/2026</a:t>
             </a:fld>
             <a:endParaRPr lang="en-US"/>
           </a:p>
@@ -3409,7 +3409,7 @@
           <a:p>
             <a:fld id="{0365B9A4-39DC-4E39-840A-704E3970A69D}" type="datetimeFigureOut">
               <a:rPr lang="en-US" smtClean="0"/>
-              <a:t>5/25/2026</a:t>
+              <a:t>5/27/2026</a:t>
             </a:fld>
             <a:endParaRPr lang="en-US"/>
           </a:p>
@@ -6179,13 +6179,16 @@
               <a:rPr lang="en-US" sz="1400" dirty="0" err="1"/>
               <a:t>GSoM</a:t>
             </a:r>
-            <a:endParaRPr lang="en-US" sz="1400" dirty="0"/>
+            <a:endParaRPr lang="en-US" sz="2000" b="1" dirty="0"/>
           </a:p>
           <a:p>
             <a:pPr marL="0" indent="0">
               <a:buNone/>
             </a:pPr>
-            <a:endParaRPr lang="en-US" sz="1400" b="1" dirty="0"/>
+            <a:r>
+              <a:rPr lang="en-US" sz="1400" dirty="0"/>
+              <a:t>https://github.com/dipialx/Corso-Python</a:t>
+            </a:r>
           </a:p>
           <a:p>
             <a:pPr marL="0" indent="0">
@@ -6719,7 +6722,7 @@
         <p:spPr/>
         <p:txBody>
           <a:bodyPr>
-            <a:normAutofit lnSpcReduction="10000"/>
+            <a:normAutofit/>
           </a:bodyPr>
           <a:lstStyle/>
           <a:p>
@@ -6782,25 +6785,7 @@
             </a:pPr>
             <a:r>
               <a:rPr lang="it-IT" dirty="0"/>
-              <a:t>Caso su LLM</a:t>
-            </a:r>
-          </a:p>
-          <a:p>
-            <a:pPr marL="0" indent="0">
-              <a:buNone/>
-            </a:pPr>
-            <a:r>
-              <a:rPr lang="it-IT" dirty="0"/>
-              <a:t>(docker)</a:t>
-            </a:r>
-          </a:p>
-          <a:p>
-            <a:pPr marL="0" indent="0">
-              <a:buNone/>
-            </a:pPr>
-            <a:r>
-              <a:rPr lang="it-IT" dirty="0"/>
-              <a:t>(database non relazionali)</a:t>
+              <a:t>RAG e MCP</a:t>
             </a:r>
           </a:p>
         </p:txBody>
